--- a/Estrategia y Transformacion/Descripciones de Puestos/Gerente OXXO Cel/ET - L3 Analista Datos.pptx
+++ b/Estrategia y Transformacion/Descripciones de Puestos/Gerente OXXO Cel/ET - L3 Analista Datos.pptx
@@ -4487,7 +4487,7 @@
               <a:defRPr/>
             </a:pPr>
             <a:r>
-              <a:rPr kumimoji="0" lang="es-MX" sz="1200" b="1" i="0" u="none" strike="noStrike" kern="1200" cap="none" spc="0" normalizeH="0" baseline="0" noProof="0" dirty="0">
+              <a:rPr kumimoji="0" lang="es-MX" sz="1100" b="0" i="0" u="none" strike="noStrike" kern="1200" cap="none" spc="0" normalizeH="0" baseline="0" noProof="0" dirty="0">
                 <a:ln>
                   <a:noFill/>
                 </a:ln>
@@ -4781,7 +4781,7 @@
               <a:defRPr/>
             </a:pPr>
             <a:r>
-              <a:rPr kumimoji="0" lang="es-MX" sz="800" b="0" i="0" u="none" strike="noStrike" kern="1200" cap="none" spc="0" normalizeH="0" baseline="0" noProof="0" dirty="0">
+              <a:rPr kumimoji="0" lang="es-MX" sz="900" b="0" i="0" u="none" strike="noStrike" kern="1200" cap="none" spc="0" normalizeH="0" baseline="0" noProof="0" dirty="0">
                 <a:ln>
                   <a:noFill/>
                 </a:ln>
@@ -4819,7 +4819,7 @@
               <a:defRPr/>
             </a:pPr>
             <a:r>
-              <a:rPr kumimoji="0" lang="es-MX" sz="800" b="0" i="0" u="none" strike="noStrike" kern="1200" cap="none" spc="0" normalizeH="0" baseline="0" noProof="0" dirty="0">
+              <a:rPr kumimoji="0" lang="es-MX" sz="900" b="0" i="0" u="none" strike="noStrike" kern="1200" cap="none" spc="0" normalizeH="0" baseline="0" noProof="0" dirty="0">
                 <a:ln>
                   <a:noFill/>
                 </a:ln>
@@ -4857,7 +4857,7 @@
               <a:defRPr/>
             </a:pPr>
             <a:r>
-              <a:rPr kumimoji="0" lang="es-MX" sz="800" b="0" i="0" u="none" strike="noStrike" kern="1200" cap="none" spc="0" normalizeH="0" baseline="0" noProof="0" dirty="0">
+              <a:rPr kumimoji="0" lang="es-MX" sz="900" b="0" i="0" u="none" strike="noStrike" kern="1200" cap="none" spc="0" normalizeH="0" baseline="0" noProof="0" dirty="0">
                 <a:ln>
                   <a:noFill/>
                 </a:ln>
@@ -4895,7 +4895,7 @@
               <a:defRPr/>
             </a:pPr>
             <a:r>
-              <a:rPr kumimoji="0" lang="es-MX" sz="800" b="0" i="0" u="none" strike="noStrike" kern="1200" cap="none" spc="0" normalizeH="0" baseline="0" noProof="0" dirty="0">
+              <a:rPr kumimoji="0" lang="es-MX" sz="900" b="0" i="0" u="none" strike="noStrike" kern="1200" cap="none" spc="0" normalizeH="0" baseline="0" noProof="0" dirty="0">
                 <a:ln>
                   <a:noFill/>
                 </a:ln>
@@ -4909,7 +4909,7 @@
                 <a:ea typeface="ＭＳ Ｐゴシック" charset="0"/>
                 <a:cs typeface="Arial"/>
               </a:rPr>
-              <a:t>Gestionar y validar la calidad de los datos utilizados en los reportes y análisis, coordinando con TI la disponibilidad y confiabilidad de las fuentes.</a:t>
+              <a:t>Gestionar y validar la calidad de los datos utilizados en reportes y análisis, coordinando con TI la disponibilidad y confiabilidad de las fuentes.</a:t>
             </a:r>
           </a:p>
           <a:p>
@@ -4933,7 +4933,7 @@
               <a:defRPr/>
             </a:pPr>
             <a:r>
-              <a:rPr kumimoji="0" lang="es-MX" sz="800" b="0" i="0" u="none" strike="noStrike" kern="1200" cap="none" spc="0" normalizeH="0" baseline="0" noProof="0" dirty="0">
+              <a:rPr kumimoji="0" lang="es-MX" sz="900" b="0" i="0" u="none" strike="noStrike" kern="1200" cap="none" spc="0" normalizeH="0" baseline="0" noProof="0" dirty="0">
                 <a:ln>
                   <a:noFill/>
                 </a:ln>
@@ -4971,7 +4971,7 @@
               <a:defRPr/>
             </a:pPr>
             <a:r>
-              <a:rPr kumimoji="0" lang="es-MX" sz="800" b="0" i="0" u="none" strike="noStrike" kern="1200" cap="none" spc="0" normalizeH="0" baseline="0" noProof="0" dirty="0">
+              <a:rPr kumimoji="0" lang="es-MX" sz="900" b="0" i="0" u="none" strike="noStrike" kern="1200" cap="none" spc="0" normalizeH="0" baseline="0" noProof="0" dirty="0">
                 <a:ln>
                   <a:noFill/>
                 </a:ln>
@@ -5265,13 +5265,13 @@
               <a:defRPr/>
             </a:pPr>
             <a:r>
-              <a:rPr lang="es-MX" sz="1000" dirty="0">
+              <a:rPr lang="es-MX" sz="900" dirty="0" b="0">
                 <a:solidFill>
                   <a:prstClr val="black"/>
                 </a:solidFill>
                 <a:latin typeface="Calibri Light" panose="020F0302020204030204"/>
               </a:rPr>
-              <a:t>Definir la metodología y fuentes de datos para cada análisis o modelo desarrollado, asegurando rigor y confiabilidad.</a:t>
+              <a:t>Definir la metodología y fuentes de datos para cada análisis o modelo, asegurando rigor y confiabilidad.</a:t>
             </a:r>
             <a:endParaRPr kumimoji="0" lang="es-MX" sz="1000" b="0" i="0" u="none" strike="noStrike" kern="1200" cap="none" spc="0" normalizeH="0" baseline="0" noProof="0" dirty="0">
               <a:ln>
@@ -5309,7 +5309,7 @@
               <a:defRPr/>
             </a:pPr>
             <a:r>
-              <a:rPr lang="es-MX" sz="1000" dirty="0">
+              <a:rPr lang="es-MX" sz="900" dirty="0" b="0">
                 <a:solidFill>
                   <a:prstClr val="black"/>
                 </a:solidFill>
@@ -5609,7 +5609,7 @@
               <a:defRPr/>
             </a:pPr>
             <a:r>
-              <a:rPr lang="es-MX" sz="1000" dirty="0">
+              <a:rPr lang="es-MX" sz="900" dirty="0" b="0">
                 <a:solidFill>
                   <a:prstClr val="black"/>
                 </a:solidFill>
@@ -5653,7 +5653,7 @@
               <a:defRPr/>
             </a:pPr>
             <a:r>
-              <a:rPr lang="es-MX" sz="1000" dirty="0">
+              <a:rPr lang="es-MX" sz="900" dirty="0" b="0">
                 <a:solidFill>
                   <a:prstClr val="black"/>
                 </a:solidFill>
@@ -9208,7 +9208,24 @@
                 <a:ea typeface="ＭＳ Ｐゴシック" charset="0"/>
                 <a:cs typeface="Arial"/>
               </a:rPr>
-              <a:t>Negocios: OXXO México</a:t>
+              <a:t>Negocios: </a:t>
+            </a:r>
+            <a:r>
+              <a:rPr kumimoji="0" lang="es-MX" sz="1200" b="0" i="0" u="none" strike="noStrike" kern="1200" cap="none" spc="0" normalizeH="0" baseline="0" noProof="0" dirty="0">
+                <a:ln>
+                  <a:noFill/>
+                </a:ln>
+                <a:solidFill>
+                  <a:prstClr val="black"/>
+                </a:solidFill>
+                <a:effectLst/>
+                <a:uLnTx/>
+                <a:uFillTx/>
+                <a:latin typeface="Calibri Light" panose="020F0302020204030204"/>
+                <a:ea typeface="ＭＳ Ｐゴシック" charset="0"/>
+                <a:cs typeface="Arial"/>
+              </a:rPr>
+              <a:t>OXXO México</a:t>
             </a:r>
             <a:endParaRPr kumimoji="0" lang="es-MX" sz="1200" b="0" i="0" u="none" strike="noStrike" kern="1200" cap="none" spc="0" normalizeH="0" baseline="0" noProof="0" dirty="0">
               <a:ln>
@@ -9295,7 +9312,24 @@
                 <a:ea typeface="ＭＳ Ｐゴシック" charset="0"/>
                 <a:cs typeface="Arial"/>
               </a:rPr>
-              <a:t>Alcance Geográfico: Nacional</a:t>
+              <a:t>Alcance Geográfico: </a:t>
+            </a:r>
+            <a:r>
+              <a:rPr kumimoji="0" lang="es-MX" sz="1200" b="0" i="0" u="none" strike="noStrike" kern="1200" cap="none" spc="0" normalizeH="0" baseline="0" noProof="0" dirty="0">
+                <a:ln>
+                  <a:noFill/>
+                </a:ln>
+                <a:solidFill>
+                  <a:prstClr val="black"/>
+                </a:solidFill>
+                <a:effectLst/>
+                <a:uLnTx/>
+                <a:uFillTx/>
+                <a:latin typeface="Calibri Light" panose="020F0302020204030204"/>
+                <a:ea typeface="ＭＳ Ｐゴシック" charset="0"/>
+                <a:cs typeface="Arial"/>
+              </a:rPr>
+              <a:t>Nacional</a:t>
             </a:r>
             <a:endParaRPr kumimoji="0" lang="es-MX" sz="1200" b="0" i="0" u="none" strike="noStrike" kern="1200" cap="none" spc="0" normalizeH="0" baseline="0" noProof="0" dirty="0">
               <a:ln>
@@ -9382,7 +9416,24 @@
                 <a:ea typeface="ＭＳ Ｐゴシック" charset="0"/>
                 <a:cs typeface="Arial"/>
               </a:rPr>
-              <a:t>Tramo de supervisión: Sin reportes directos</a:t>
+              <a:t>Tramo de supervisión: </a:t>
+            </a:r>
+            <a:r>
+              <a:rPr kumimoji="0" lang="es-MX" sz="1200" b="0" i="0" u="none" strike="noStrike" kern="1200" cap="none" spc="0" normalizeH="0" baseline="0" noProof="0" dirty="0">
+                <a:ln>
+                  <a:noFill/>
+                </a:ln>
+                <a:solidFill>
+                  <a:prstClr val="black"/>
+                </a:solidFill>
+                <a:effectLst/>
+                <a:uLnTx/>
+                <a:uFillTx/>
+                <a:latin typeface="Calibri Light" panose="020F0302020204030204"/>
+                <a:ea typeface="ＭＳ Ｐゴシック" charset="0"/>
+                <a:cs typeface="Arial"/>
+              </a:rPr>
+              <a:t>Sin reportes directos</a:t>
             </a:r>
           </a:p>
           <a:p>
@@ -9734,7 +9785,7 @@
               <a:defRPr/>
             </a:pPr>
             <a:r>
-              <a:rPr kumimoji="0" lang="es-MX" sz="1200" b="1" i="0" u="none" strike="noStrike" kern="1200" cap="none" spc="0" normalizeH="0" baseline="0" noProof="0" dirty="0">
+              <a:rPr kumimoji="0" lang="es-MX" sz="900" b="1" i="0" u="none" strike="noStrike" kern="1200" cap="none" spc="0" normalizeH="0" baseline="0" noProof="0" dirty="0">
                 <a:ln>
                   <a:noFill/>
                 </a:ln>
@@ -9749,6 +9800,23 @@
                 <a:cs typeface="Arial"/>
               </a:rPr>
               <a:t>Reportes Directos: </a:t>
+            </a:r>
+            <a:r>
+              <a:rPr kumimoji="0" lang="es-MX" sz="900" b="0" i="0" u="none" strike="noStrike" kern="1200" cap="none" spc="0" normalizeH="0" baseline="0" noProof="0" dirty="0">
+                <a:ln>
+                  <a:noFill/>
+                </a:ln>
+                <a:solidFill>
+                  <a:prstClr val="black"/>
+                </a:solidFill>
+                <a:effectLst/>
+                <a:uLnTx/>
+                <a:uFillTx/>
+                <a:latin typeface="Calibri Light" panose="020F0302020204030204"/>
+                <a:ea typeface="ＭＳ Ｐゴシック" charset="0"/>
+                <a:cs typeface="Arial"/>
+              </a:rPr>
+              <a:t/>
             </a:r>
             <a:endParaRPr kumimoji="0" lang="es-MX" sz="1200" b="0" i="0" u="none" strike="noStrike" kern="1200" cap="none" spc="0" normalizeH="0" baseline="0" noProof="0" dirty="0">
               <a:ln>
@@ -9786,7 +9854,7 @@
               <a:defRPr/>
             </a:pPr>
             <a:r>
-              <a:rPr kumimoji="0" lang="es-MX" sz="1200" b="1" i="0" u="none" strike="noStrike" kern="1200" cap="none" spc="0" normalizeH="0" baseline="0" noProof="0" dirty="0">
+              <a:rPr kumimoji="0" lang="es-MX" sz="900" b="1" i="0" u="none" strike="noStrike" kern="1200" cap="none" spc="0" normalizeH="0" baseline="0" noProof="0" dirty="0">
                 <a:ln>
                   <a:noFill/>
                 </a:ln>
@@ -9800,7 +9868,24 @@
                 <a:ea typeface="ＭＳ Ｐゴシック" charset="0"/>
                 <a:cs typeface="Arial"/>
               </a:rPr>
-              <a:t>Pares: Analista Operación Teléfonos y Chips, Coordinador Product Owner CX, Coordinador Comercial Fidelización Clientes, Gerente Área Adquisición Cliente</a:t>
+              <a:t>Pares: </a:t>
+            </a:r>
+            <a:r>
+              <a:rPr kumimoji="0" lang="es-MX" sz="900" b="0" i="0" u="none" strike="noStrike" kern="1200" cap="none" spc="0" normalizeH="0" baseline="0" noProof="0" dirty="0">
+                <a:ln>
+                  <a:noFill/>
+                </a:ln>
+                <a:solidFill>
+                  <a:prstClr val="black"/>
+                </a:solidFill>
+                <a:effectLst/>
+                <a:uLnTx/>
+                <a:uFillTx/>
+                <a:latin typeface="Calibri Light" panose="020F0302020204030204"/>
+                <a:ea typeface="ＭＳ Ｐゴシック" charset="0"/>
+                <a:cs typeface="Arial"/>
+              </a:rPr>
+              <a:t>Analista Operación Teléfonos y Chips, Coordinador Product Owner CX, Coordinador Comercial Fidelización Clientes, Gerente Área Adquisición Cliente</a:t>
             </a:r>
             <a:endParaRPr kumimoji="0" lang="es-MX" sz="1200" b="0" i="0" u="none" strike="noStrike" kern="1200" cap="none" spc="0" normalizeH="0" baseline="0" noProof="0" dirty="0">
               <a:ln>
@@ -11545,6 +11630,7 @@
                         <a:cs typeface="Arial" panose="020B0604020202020204" pitchFamily="34" charset="0"/>
                       </a:endParaRPr>
                       <a:r>
+                        <a:rPr sz="1050" b="0"/>
                         <a:t>Gerente OXXO Cel</a:t>
                       </a:r>
                     </a:p>
@@ -11608,6 +11694,7 @@
                         <a:cs typeface="Arial" panose="020B0604020202020204" pitchFamily="34" charset="0"/>
                       </a:endParaRPr>
                       <a:r>
+                        <a:rPr sz="1050" b="0"/>
                         <a:t>Entrega de reportes y análisis estratégicos del negocio</a:t>
                       </a:r>
                     </a:p>
@@ -11685,6 +11772,7 @@
                         <a:cs typeface="Arial" panose="020B0604020202020204" pitchFamily="34" charset="0"/>
                       </a:endParaRPr>
                       <a:r>
+                        <a:rPr sz="1050" b="0"/>
                         <a:t>Semanal</a:t>
                       </a:r>
                     </a:p>
@@ -11742,6 +11830,7 @@
                     <a:p>
                       <a:endParaRPr lang="es-MX"/>
                       <a:r>
+                        <a:rPr sz="900" b="1"/>
                         <a:t/>
                       </a:r>
                     </a:p>
@@ -11768,6 +11857,7 @@
                         <a:cs typeface="Arial" panose="020B0604020202020204" pitchFamily="34" charset="0"/>
                       </a:endParaRPr>
                       <a:r>
+                        <a:rPr sz="1050" b="0"/>
                         <a:t>TI</a:t>
                       </a:r>
                     </a:p>
@@ -11834,6 +11924,7 @@
                         <a:cs typeface="Arial" panose="020B0604020202020204" pitchFamily="34" charset="0"/>
                       </a:endParaRPr>
                       <a:r>
+                        <a:rPr sz="1050" b="0"/>
                         <a:t>Acceso a fuentes de datos e integración de sistemas de información</a:t>
                       </a:r>
                     </a:p>
@@ -11911,6 +12002,7 @@
                         <a:cs typeface="Arial" panose="020B0604020202020204" pitchFamily="34" charset="0"/>
                       </a:endParaRPr>
                       <a:r>
+                        <a:rPr sz="1050" b="0"/>
                         <a:t>Semanal</a:t>
                       </a:r>
                     </a:p>
@@ -11968,6 +12060,7 @@
                     <a:p>
                       <a:endParaRPr lang="es-MX"/>
                       <a:r>
+                        <a:rPr sz="900" b="1"/>
                         <a:t/>
                       </a:r>
                     </a:p>
@@ -11994,6 +12087,7 @@
                         <a:cs typeface="Arial" panose="020B0604020202020204" pitchFamily="34" charset="0"/>
                       </a:endParaRPr>
                       <a:r>
+                        <a:rPr sz="1050" b="0"/>
                         <a:t>Todas las áreas de OXXO Cel</a:t>
                       </a:r>
                     </a:p>
@@ -12071,6 +12165,7 @@
                         <a:cs typeface="Arial" panose="020B0604020202020204" pitchFamily="34" charset="0"/>
                       </a:endParaRPr>
                       <a:r>
+                        <a:rPr sz="1050" b="0"/>
                         <a:t>Soporte analítico para toma de decisiones</a:t>
                       </a:r>
                     </a:p>
@@ -12148,6 +12243,7 @@
                         <a:cs typeface="Arial" panose="020B0604020202020204" pitchFamily="34" charset="0"/>
                       </a:endParaRPr>
                       <a:r>
+                        <a:rPr sz="1050" b="0"/>
                         <a:t>Semanal</a:t>
                       </a:r>
                     </a:p>
